--- a/metro/metro-s01-just-listed.pptx
+++ b/metro/metro-s01-just-listed.pptx
@@ -3417,9 +3417,9 @@
                 <a:solidFill>
                   <a:srgbClr val="FFFFFF"/>
                 </a:solidFill>
-                <a:latin typeface="Space Grotesk"/>
-                <a:ea typeface="Space Grotesk"/>
-                <a:cs typeface="Space Grotesk"/>
+                <a:latin typeface="HK Grotesk"/>
+                <a:ea typeface="HK Grotesk"/>
+                <a:cs typeface="HK Grotesk"/>
               </a:rPr>
               <a:t>1200 N Wells, 14C</a:t>
             </a:r>
@@ -3487,9 +3487,9 @@
                 <a:solidFill>
                   <a:srgbClr val="2D5BE3"/>
                 </a:solidFill>
-                <a:latin typeface="Space Grotesk"/>
-                <a:ea typeface="Space Grotesk"/>
-                <a:cs typeface="Space Grotesk"/>
+                <a:latin typeface="HK Grotesk"/>
+                <a:ea typeface="HK Grotesk"/>
+                <a:cs typeface="HK Grotesk"/>
               </a:rPr>
               <a:t>$895,000</a:t>
             </a:r>
@@ -3522,9 +3522,9 @@
                 <a:solidFill>
                   <a:srgbClr val="FFFFFF"/>
                 </a:solidFill>
-                <a:latin typeface="Space Grotesk"/>
-                <a:ea typeface="Space Grotesk"/>
-                <a:cs typeface="Space Grotesk"/>
+                <a:latin typeface="HK Grotesk"/>
+                <a:ea typeface="HK Grotesk"/>
+                <a:cs typeface="HK Grotesk"/>
               </a:rPr>
               <a:t>See the full tour</a:t>
             </a:r>
@@ -3557,9 +3557,9 @@
                 <a:solidFill>
                   <a:srgbClr val="2D5BE3"/>
                 </a:solidFill>
-                <a:latin typeface="Space Grotesk"/>
-                <a:ea typeface="Space Grotesk"/>
-                <a:cs typeface="Space Grotesk"/>
+                <a:latin typeface="HK Grotesk"/>
+                <a:ea typeface="HK Grotesk"/>
+                <a:cs typeface="HK Grotesk"/>
               </a:rPr>
               <a:t>↗</a:t>
             </a:r>

--- a/metro/metro-s01-just-listed.pptx
+++ b/metro/metro-s01-just-listed.pptx
@@ -3140,7 +3140,7 @@
         </p:nvSpPr>
         <p:spPr>
           <a:xfrm>
-            <a:off x="762000" y="15735300"/>
+            <a:off x="762000" y="15525750"/>
             <a:ext cx="8763000" cy="9525"/>
           </a:xfrm>
           <a:prstGeom prst="rect">
@@ -3228,8 +3228,8 @@
         </p:nvSpPr>
         <p:spPr>
           <a:xfrm>
-            <a:off x="762000" y="15735300"/>
-            <a:ext cx="9525" cy="647700"/>
+            <a:off x="762000" y="15525750"/>
+            <a:ext cx="9525" cy="857250"/>
           </a:xfrm>
           <a:prstGeom prst="rect">
             <a:avLst/>
@@ -3272,8 +3272,8 @@
         </p:nvSpPr>
         <p:spPr>
           <a:xfrm>
-            <a:off x="9515475" y="15735300"/>
-            <a:ext cx="9525" cy="647700"/>
+            <a:off x="9515475" y="15525750"/>
+            <a:ext cx="9525" cy="857250"/>
           </a:xfrm>
           <a:prstGeom prst="rect">
             <a:avLst/>
@@ -3316,7 +3316,7 @@
         </p:nvSpPr>
         <p:spPr>
           <a:xfrm>
-            <a:off x="1024416" y="16012004"/>
+            <a:off x="1081566" y="15907229"/>
             <a:ext cx="94293" cy="94292"/>
           </a:xfrm>
           <a:prstGeom prst="rect">
@@ -3361,7 +3361,7 @@
         <p:spPr>
           <a:xfrm>
             <a:off x="762000" y="12096750"/>
-            <a:ext cx="14401800" cy="133350"/>
+            <a:ext cx="14401800" cy="228600"/>
           </a:xfrm>
           <a:prstGeom prst="rect">
             <a:avLst/>
@@ -3374,7 +3374,7 @@
           <a:p>
             <a:pPr algn="l"/>
             <a:r>
-              <a:rPr sz="900" i="0" b="0" spc="324">
+              <a:rPr sz="1575" i="0" b="0" spc="472">
                 <a:solidFill>
                   <a:srgbClr val="2D5BE3"/>
                 </a:solidFill>
@@ -3395,7 +3395,7 @@
         </p:nvSpPr>
         <p:spPr>
           <a:xfrm>
-            <a:off x="762000" y="12382500"/>
+            <a:off x="762000" y="12477750"/>
             <a:ext cx="14401800" cy="630882"/>
           </a:xfrm>
           <a:prstGeom prst="rect">
@@ -3417,9 +3417,9 @@
                 <a:solidFill>
                   <a:srgbClr val="FFFFFF"/>
                 </a:solidFill>
-                <a:latin typeface="HK Grotesk"/>
-                <a:ea typeface="HK Grotesk"/>
-                <a:cs typeface="HK Grotesk"/>
+                <a:latin typeface="Space Grotesk"/>
+                <a:ea typeface="Space Grotesk"/>
+                <a:cs typeface="Space Grotesk"/>
               </a:rPr>
               <a:t>1200 N Wells, 14C</a:t>
             </a:r>
@@ -3434,8 +3434,8 @@
         </p:nvSpPr>
         <p:spPr>
           <a:xfrm>
-            <a:off x="762000" y="13165782"/>
-            <a:ext cx="14401800" cy="104775"/>
+            <a:off x="762000" y="13261032"/>
+            <a:ext cx="14401800" cy="180975"/>
           </a:xfrm>
           <a:prstGeom prst="rect">
             <a:avLst/>
@@ -3448,7 +3448,7 @@
           <a:p>
             <a:pPr algn="l"/>
             <a:r>
-              <a:rPr sz="750" i="0" b="0" spc="240">
+              <a:rPr sz="1200" i="0" b="0" spc="384">
                 <a:solidFill>
                   <a:srgbClr val="B8B9BA"/>
                 </a:solidFill>
@@ -3469,7 +3469,7 @@
         </p:nvSpPr>
         <p:spPr>
           <a:xfrm>
-            <a:off x="762000" y="13442007"/>
+            <a:off x="762000" y="13613457"/>
             <a:ext cx="14401800" cy="657225"/>
           </a:xfrm>
           <a:prstGeom prst="rect">
@@ -3487,9 +3487,9 @@
                 <a:solidFill>
                   <a:srgbClr val="2D5BE3"/>
                 </a:solidFill>
-                <a:latin typeface="HK Grotesk"/>
-                <a:ea typeface="HK Grotesk"/>
-                <a:cs typeface="HK Grotesk"/>
+                <a:latin typeface="Space Grotesk"/>
+                <a:ea typeface="Space Grotesk"/>
+                <a:cs typeface="Space Grotesk"/>
               </a:rPr>
               <a:t>$895,000</a:t>
             </a:r>
@@ -3504,8 +3504,8 @@
         </p:nvSpPr>
         <p:spPr>
           <a:xfrm>
-            <a:off x="1238250" y="15978188"/>
-            <a:ext cx="2186226" cy="161925"/>
+            <a:off x="1314450" y="15825788"/>
+            <a:ext cx="3148965" cy="257175"/>
           </a:xfrm>
           <a:prstGeom prst="rect">
             <a:avLst/>
@@ -3518,13 +3518,13 @@
           <a:p>
             <a:pPr algn="l"/>
             <a:r>
-              <a:rPr sz="1125" i="0" b="1" spc="22">
+              <a:rPr sz="1725" i="0" b="1" spc="34">
                 <a:solidFill>
                   <a:srgbClr val="FFFFFF"/>
                 </a:solidFill>
-                <a:latin typeface="HK Grotesk"/>
-                <a:ea typeface="HK Grotesk"/>
-                <a:cs typeface="HK Grotesk"/>
+                <a:latin typeface="Space Grotesk"/>
+                <a:ea typeface="Space Grotesk"/>
+                <a:cs typeface="Space Grotesk"/>
               </a:rPr>
               <a:t>See the full tour</a:t>
             </a:r>
@@ -3539,8 +3539,8 @@
         </p:nvSpPr>
         <p:spPr>
           <a:xfrm>
-            <a:off x="9105900" y="15954375"/>
-            <a:ext cx="609600" cy="209550"/>
+            <a:off x="9001125" y="15821025"/>
+            <a:ext cx="685800" cy="266700"/>
           </a:xfrm>
           <a:prstGeom prst="rect">
             <a:avLst/>
@@ -3553,13 +3553,13 @@
           <a:p>
             <a:pPr algn="l"/>
             <a:r>
-              <a:rPr sz="1350" i="0" b="0">
+              <a:rPr sz="1800" i="0" b="0">
                 <a:solidFill>
                   <a:srgbClr val="2D5BE3"/>
                 </a:solidFill>
-                <a:latin typeface="HK Grotesk"/>
-                <a:ea typeface="HK Grotesk"/>
-                <a:cs typeface="HK Grotesk"/>
+                <a:latin typeface="Space Grotesk"/>
+                <a:ea typeface="Space Grotesk"/>
+                <a:cs typeface="Space Grotesk"/>
               </a:rPr>
               <a:t>↗</a:t>
             </a:r>
@@ -3574,8 +3574,8 @@
         </p:nvSpPr>
         <p:spPr>
           <a:xfrm>
-            <a:off x="2557031" y="17297400"/>
-            <a:ext cx="5172789" cy="123825"/>
+            <a:off x="1468041" y="17249775"/>
+            <a:ext cx="7350919" cy="180975"/>
           </a:xfrm>
           <a:prstGeom prst="rect">
             <a:avLst/>
@@ -3588,7 +3588,7 @@
           <a:p>
             <a:pPr algn="ctr"/>
             <a:r>
-              <a:rPr sz="825" i="0" b="0" spc="264">
+              <a:rPr sz="1200" i="0" b="0" spc="384">
                 <a:solidFill>
                   <a:srgbClr val="B8B9BA"/>
                 </a:solidFill>

--- a/metro/metro-s01-just-listed.pptx
+++ b/metro/metro-s01-just-listed.pptx
@@ -3140,7 +3140,7 @@
         </p:nvSpPr>
         <p:spPr>
           <a:xfrm>
-            <a:off x="762000" y="15525750"/>
+            <a:off x="762000" y="15478125"/>
             <a:ext cx="8763000" cy="9525"/>
           </a:xfrm>
           <a:prstGeom prst="rect">
@@ -3228,8 +3228,8 @@
         </p:nvSpPr>
         <p:spPr>
           <a:xfrm>
-            <a:off x="762000" y="15525750"/>
-            <a:ext cx="9525" cy="857250"/>
+            <a:off x="762000" y="15478125"/>
+            <a:ext cx="9525" cy="904875"/>
           </a:xfrm>
           <a:prstGeom prst="rect">
             <a:avLst/>
@@ -3272,8 +3272,8 @@
         </p:nvSpPr>
         <p:spPr>
           <a:xfrm>
-            <a:off x="9515475" y="15525750"/>
-            <a:ext cx="9525" cy="857250"/>
+            <a:off x="9515475" y="15478125"/>
+            <a:ext cx="9525" cy="904875"/>
           </a:xfrm>
           <a:prstGeom prst="rect">
             <a:avLst/>
@@ -3316,7 +3316,7 @@
         </p:nvSpPr>
         <p:spPr>
           <a:xfrm>
-            <a:off x="1081566" y="15907229"/>
+            <a:off x="1081566" y="15883417"/>
             <a:ext cx="94293" cy="94292"/>
           </a:xfrm>
           <a:prstGeom prst="rect">
@@ -3361,7 +3361,7 @@
         <p:spPr>
           <a:xfrm>
             <a:off x="762000" y="12096750"/>
-            <a:ext cx="14401800" cy="228600"/>
+            <a:ext cx="14401800" cy="238125"/>
           </a:xfrm>
           <a:prstGeom prst="rect">
             <a:avLst/>
@@ -3374,7 +3374,7 @@
           <a:p>
             <a:pPr algn="l"/>
             <a:r>
-              <a:rPr sz="1575" i="0" b="0" spc="472">
+              <a:rPr sz="1650" i="0" b="0" spc="462">
                 <a:solidFill>
                   <a:srgbClr val="2D5BE3"/>
                 </a:solidFill>
@@ -3395,7 +3395,7 @@
         </p:nvSpPr>
         <p:spPr>
           <a:xfrm>
-            <a:off x="762000" y="12477750"/>
+            <a:off x="762000" y="12487275"/>
             <a:ext cx="14401800" cy="630882"/>
           </a:xfrm>
           <a:prstGeom prst="rect">
@@ -3434,8 +3434,8 @@
         </p:nvSpPr>
         <p:spPr>
           <a:xfrm>
-            <a:off x="762000" y="13261032"/>
-            <a:ext cx="14401800" cy="180975"/>
+            <a:off x="762000" y="13270557"/>
+            <a:ext cx="14401800" cy="209550"/>
           </a:xfrm>
           <a:prstGeom prst="rect">
             <a:avLst/>
@@ -3448,7 +3448,7 @@
           <a:p>
             <a:pPr algn="l"/>
             <a:r>
-              <a:rPr sz="1200" i="0" b="0" spc="384">
+              <a:rPr sz="1425" i="0" b="0" spc="456">
                 <a:solidFill>
                   <a:srgbClr val="B8B9BA"/>
                 </a:solidFill>
@@ -3469,7 +3469,7 @@
         </p:nvSpPr>
         <p:spPr>
           <a:xfrm>
-            <a:off x="762000" y="13613457"/>
+            <a:off x="762000" y="13651557"/>
             <a:ext cx="14401800" cy="657225"/>
           </a:xfrm>
           <a:prstGeom prst="rect">
@@ -3504,8 +3504,8 @@
         </p:nvSpPr>
         <p:spPr>
           <a:xfrm>
-            <a:off x="1314450" y="15825788"/>
-            <a:ext cx="3148965" cy="257175"/>
+            <a:off x="1314450" y="15782925"/>
+            <a:ext cx="3630216" cy="295275"/>
           </a:xfrm>
           <a:prstGeom prst="rect">
             <a:avLst/>
@@ -3518,7 +3518,7 @@
           <a:p>
             <a:pPr algn="l"/>
             <a:r>
-              <a:rPr sz="1725" i="0" b="1" spc="34">
+              <a:rPr sz="2025" i="0" b="1" spc="40">
                 <a:solidFill>
                   <a:srgbClr val="FFFFFF"/>
                 </a:solidFill>
@@ -3539,8 +3539,8 @@
         </p:nvSpPr>
         <p:spPr>
           <a:xfrm>
-            <a:off x="9001125" y="15821025"/>
-            <a:ext cx="685800" cy="266700"/>
+            <a:off x="8972550" y="15773400"/>
+            <a:ext cx="731520" cy="314325"/>
           </a:xfrm>
           <a:prstGeom prst="rect">
             <a:avLst/>
@@ -3553,7 +3553,7 @@
           <a:p>
             <a:pPr algn="l"/>
             <a:r>
-              <a:rPr sz="1800" i="0" b="0">
+              <a:rPr sz="2100" i="0" b="0">
                 <a:solidFill>
                   <a:srgbClr val="2D5BE3"/>
                 </a:solidFill>
@@ -3574,8 +3574,8 @@
         </p:nvSpPr>
         <p:spPr>
           <a:xfrm>
-            <a:off x="1468041" y="17249775"/>
-            <a:ext cx="7350919" cy="180975"/>
+            <a:off x="814626" y="17221200"/>
+            <a:ext cx="8657749" cy="209550"/>
           </a:xfrm>
           <a:prstGeom prst="rect">
             <a:avLst/>
@@ -3588,7 +3588,7 @@
           <a:p>
             <a:pPr algn="ctr"/>
             <a:r>
-              <a:rPr sz="1200" i="0" b="0" spc="384">
+              <a:rPr sz="1425" i="0" b="0" spc="456">
                 <a:solidFill>
                   <a:srgbClr val="B8B9BA"/>
                 </a:solidFill>
